--- a/tmp-tj/deck.pptx
+++ b/tmp-tj/deck.pptx
@@ -4861,7 +4861,7 @@
                           </a:solidFill>
                           <a:latin typeface="Montserrat"/>
                         </a:rPr>
-                        <a:t>55 180</a:t>
+                        <a:t>55 181</a:t>
                       </a:r>
                     </a:p>
                   </a:txBody>
@@ -4907,7 +4907,7 @@
                           </a:solidFill>
                           <a:latin typeface="Montserrat"/>
                         </a:rPr>
-                        <a:t>environ 1 post par semaine (11 posts du 4/08 au 15/10)</a:t>
+                        <a:t>environ 1 post par semaine (une douzaine du 17/08 au 23/10)</a:t>
                       </a:r>
                     </a:p>
                   </a:txBody>
@@ -4929,7 +4929,7 @@
                           </a:solidFill>
                           <a:latin typeface="Montserrat"/>
                         </a:rPr>
-                        <a:t>environ 1 post par semaine (4 posts du 7/09 au 2/10)</a:t>
+                        <a:t>environ 1 post par semaine (10 posts du 7/08 au 26/10)</a:t>
                       </a:r>
                     </a:p>
                   </a:txBody>
@@ -4951,7 +4951,7 @@
                           </a:solidFill>
                           <a:latin typeface="Montserrat"/>
                         </a:rPr>
-                        <a:t>2 à 3 posts par semaine (12 posts du 25/08 au 21/10)</a:t>
+                        <a:t>3 posts par semaine environ (une douzaine en octobre)</a:t>
                       </a:r>
                     </a:p>
                   </a:txBody>
@@ -4975,7 +4975,7 @@
                           </a:solidFill>
                           <a:latin typeface="Montserrat"/>
                         </a:rPr>
-                        <a:t>Réactions par post</a:t>
+                        <a:t>Réactions par post (posts relevés)</a:t>
                       </a:r>
                     </a:p>
                   </a:txBody>
@@ -4997,7 +4997,7 @@
                           </a:solidFill>
                           <a:latin typeface="Montserrat"/>
                         </a:rPr>
-                        <a:t>20 à 98</a:t>
+                        <a:t>20 à 98 (6 posts)</a:t>
                       </a:r>
                     </a:p>
                   </a:txBody>
@@ -5019,7 +5019,7 @@
                           </a:solidFill>
                           <a:latin typeface="Montserrat"/>
                         </a:rPr>
-                        <a:t>5 à 12</a:t>
+                        <a:t>5 à 12 (5 posts)</a:t>
                       </a:r>
                     </a:p>
                   </a:txBody>
@@ -5041,7 +5041,7 @@
                           </a:solidFill>
                           <a:latin typeface="Montserrat"/>
                         </a:rPr>
-                        <a:t>30 à 275</a:t>
+                        <a:t>35 à 275 (5 posts)</a:t>
                       </a:r>
                     </a:p>
                   </a:txBody>
@@ -5357,7 +5357,7 @@
                           </a:solidFill>
                           <a:latin typeface="Montserrat"/>
                         </a:rPr>
-                        <a:t>Facebook lescentauresroutiers.ci (980 abonnés)</a:t>
+                        <a:t>page Facebook lescentauresroutiers.ci</a:t>
                       </a:r>
                     </a:p>
                   </a:txBody>

--- a/tmp-tj/deck.pptx
+++ b/tmp-tj/deck.pptx
@@ -8050,7 +8050,7 @@
                 </a:solidFill>
                 <a:latin typeface="Montserrat"/>
               </a:rPr>
-              <a:t>photos du site prolinelogistic.com, recadrées en grand. Jamais de banque d’images ni de camion détouré.</a:t>
+              <a:t>photos du site www.prolinelogistic.com, recadrées en grand. Jamais de banque d’images ni de camion détouré.</a:t>
             </a:r>
           </a:p>
         </p:txBody>
@@ -9229,7 +9229,7 @@
                 </a:solidFill>
                 <a:latin typeface="Montserrat"/>
               </a:rPr>
-              <a:t>prolinelogistic.com, page d’accueil et page Services, relevées le 29/10/2026.</a:t>
+              <a:t>www.prolinelogistic.com, page d’accueil et page Services, relevées le 29/10/2026.</a:t>
             </a:r>
           </a:p>
         </p:txBody>
